--- a/data/reports/Sample 2026 Cross-Border Tax Filing Update.pptx
+++ b/data/reports/Sample 2026 Cross-Border Tax Filing Update.pptx
@@ -10,6 +10,8 @@
     <p:sldId id="258" r:id="rId9"/>
     <p:sldId id="259" r:id="rId10"/>
     <p:sldId id="260" r:id="rId11"/>
+    <p:sldId id="261" r:id="rId12"/>
+    <p:sldId id="262" r:id="rId13"/>
   </p:sldIdLst>
   <p:sldSz cx="9144000" cy="5143500" type="screen4x3"/>
   <p:notesSz cx="6858000" cy="9144000"/>
@@ -3268,7 +3270,7 @@
               </a:defRPr>
             </a:pPr>
             <a:r>
-              <a:t>April 27, 2026</a:t>
+              <a:t>May 07, 2026</a:t>
             </a:r>
           </a:p>
         </p:txBody>
@@ -3301,7 +3303,7 @@
               </a:defRPr>
             </a:pPr>
             <a:r>
-              <a:t>2026/04/27</a:t>
+              <a:t>2026/05/07</a:t>
             </a:r>
           </a:p>
         </p:txBody>
@@ -3549,7 +3551,7 @@
               </a:defRPr>
             </a:pPr>
             <a:r>
-              <a:t>• 頁1：修法重點與影響範圍: 2026年4月草案新增跨境服務收入跨国集團強制申報義務</a:t>
+              <a:t>• 頁1：政策重點與生效日期: 2026年7月1日起實施跨境服務收入強制申報義務</a:t>
             </a:r>
           </a:p>
           <a:p>
@@ -3565,7 +3567,7 @@
               </a:defRPr>
             </a:pPr>
             <a:r>
-              <a:t>• 頁2：風險與管理: 遲交風險：罰款（最高申報金額10%）、審計檢查及補充文件要求</a:t>
+              <a:t>• 頁2：影響對象與申報門檻: 適用對象：從事跨境業務之企業（含服務貿易收入）</a:t>
             </a:r>
           </a:p>
           <a:p>
@@ -3581,7 +3583,23 @@
               </a:defRPr>
             </a:pPr>
             <a:r>
-              <a:t>• 頁3：建議行動: 成立跨部門專案小組（財務/法務/稅務）</a:t>
+              <a:t>• 頁3：風險判斷與後果: 高風險等級：罰款、審計抽查、補充文件要求</a:t>
+            </a:r>
+          </a:p>
+          <a:p>
+            <a:pPr>
+              <a:spcAft>
+                <a:spcPts val="1200"/>
+              </a:spcAft>
+              <a:defRPr sz="2000">
+                <a:solidFill>
+                  <a:srgbClr val="222C38"/>
+                </a:solidFill>
+                <a:latin typeface="Taipei Sans TC Beta"/>
+              </a:defRPr>
+            </a:pPr>
+            <a:r>
+              <a:t>• 頁4：管理重點與行動建議: 指定專案負責人：建立跨部門協調機制</a:t>
             </a:r>
           </a:p>
         </p:txBody>
@@ -3614,7 +3632,7 @@
               </a:defRPr>
             </a:pPr>
             <a:r>
-              <a:t>2026/04/27</a:t>
+              <a:t>2026/05/07</a:t>
             </a:r>
           </a:p>
         </p:txBody>
@@ -3823,7 +3841,7 @@
               </a:defRPr>
             </a:pPr>
             <a:r>
-              <a:t>頁1：修法重點與影響範圍</a:t>
+              <a:t>頁1：政策重點與生效日期</a:t>
             </a:r>
           </a:p>
         </p:txBody>
@@ -3862,7 +3880,7 @@
               </a:defRPr>
             </a:pPr>
             <a:r>
-              <a:t>• 2026年4月草案新增跨境服務收入跨国集團強制申報義務</a:t>
+              <a:t>• 2026年7月1日起實施跨境服務收入強制申報義務</a:t>
             </a:r>
           </a:p>
           <a:p>
@@ -3878,23 +3896,7 @@
               </a:defRPr>
             </a:pPr>
             <a:r>
-              <a:t>• 適用對象：擁有跨境服務收入且符合規模門檻的跨国集團</a:t>
-            </a:r>
-          </a:p>
-          <a:p>
-            <a:pPr>
-              <a:spcAft>
-                <a:spcPts val="1200"/>
-              </a:spcAft>
-              <a:defRPr sz="2200">
-                <a:solidFill>
-                  <a:srgbClr val="222C38"/>
-                </a:solidFill>
-                <a:latin typeface="Taipei Sans TC Beta"/>
-              </a:defRPr>
-            </a:pPr>
-            <a:r>
-              <a:t>• 生效日期：2026年7月1日（首次申報截止日需提前6個月準備）</a:t>
+              <a:t>• 草案規範：跨境集團需於首次申報截止日前完成內控檢測與文件準備</a:t>
             </a:r>
           </a:p>
         </p:txBody>
@@ -3927,7 +3929,7 @@
               </a:defRPr>
             </a:pPr>
             <a:r>
-              <a:t>2026/04/27</a:t>
+              <a:t>2026/05/07</a:t>
             </a:r>
           </a:p>
         </p:txBody>
@@ -4136,7 +4138,7 @@
               </a:defRPr>
             </a:pPr>
             <a:r>
-              <a:t>頁2：風險與管理</a:t>
+              <a:t>頁2：影響對象與申報門檻</a:t>
             </a:r>
           </a:p>
         </p:txBody>
@@ -4175,7 +4177,7 @@
               </a:defRPr>
             </a:pPr>
             <a:r>
-              <a:t>• 遲交風險：罰款（最高申報金額10%）、審計檢查及補充文件要求</a:t>
+              <a:t>• 適用對象：從事跨境業務之企業（含服務貿易收入）</a:t>
             </a:r>
           </a:p>
           <a:p>
@@ -4191,23 +4193,7 @@
               </a:defRPr>
             </a:pPr>
             <a:r>
-              <a:t>• 需指定專人確認申報門檻標準（如收入門檻或資產門檻）</a:t>
-            </a:r>
-          </a:p>
-          <a:p>
-            <a:pPr>
-              <a:spcAft>
-                <a:spcPts val="1200"/>
-              </a:spcAft>
-              <a:defRPr sz="2200">
-                <a:solidFill>
-                  <a:srgbClr val="222C38"/>
-                </a:solidFill>
-                <a:latin typeface="Taipei Sans TC Beta"/>
-              </a:defRPr>
-            </a:pPr>
-            <a:r>
-              <a:t>• 後續監控：持續追蹤稅務當局發布的實務指引與申報格式</a:t>
+              <a:t>• 報告門檻：跨境服務收入達特定金額門檻（需確認具體數值）</a:t>
             </a:r>
           </a:p>
         </p:txBody>
@@ -4240,7 +4226,7 @@
               </a:defRPr>
             </a:pPr>
             <a:r>
-              <a:t>2026/04/27</a:t>
+              <a:t>2026/05/07</a:t>
             </a:r>
           </a:p>
         </p:txBody>
@@ -4449,7 +4435,7 @@
               </a:defRPr>
             </a:pPr>
             <a:r>
-              <a:t>頁3：建議行動</a:t>
+              <a:t>頁3：風險判斷與後果</a:t>
             </a:r>
           </a:p>
         </p:txBody>
@@ -4488,7 +4474,7 @@
               </a:defRPr>
             </a:pPr>
             <a:r>
-              <a:t>• 成立跨部門專案小組（財務/法務/稅務）</a:t>
+              <a:t>• 高風險等級：罰款、審計抽查、補充文件要求</a:t>
             </a:r>
           </a:p>
           <a:p>
@@ -4504,39 +4490,7 @@
               </a:defRPr>
             </a:pPr>
             <a:r>
-              <a:t>• 2026年1月前完成系統與流程升級（含申報模板與文件存檔）</a:t>
-            </a:r>
-          </a:p>
-          <a:p>
-            <a:pPr>
-              <a:spcAft>
-                <a:spcPts val="1200"/>
-              </a:spcAft>
-              <a:defRPr sz="2200">
-                <a:solidFill>
-                  <a:srgbClr val="222C38"/>
-                </a:solidFill>
-                <a:latin typeface="Taipei Sans TC Beta"/>
-              </a:defRPr>
-            </a:pPr>
-            <a:r>
-              <a:t>• 針對高風險業務進行合規培訓（含跨境服務收入歸屬判斷）</a:t>
-            </a:r>
-          </a:p>
-          <a:p>
-            <a:pPr>
-              <a:spcAft>
-                <a:spcPts val="1200"/>
-              </a:spcAft>
-              <a:defRPr sz="2200">
-                <a:solidFill>
-                  <a:srgbClr val="222C38"/>
-                </a:solidFill>
-                <a:latin typeface="Taipei Sans TC Beta"/>
-              </a:defRPr>
-            </a:pPr>
-            <a:r>
-              <a:t>• 每季審查申報門檻變動與稅務當局最新指引</a:t>
+              <a:t>• 違規後果：可能面臨稅務機關主動調查與處罰</a:t>
             </a:r>
           </a:p>
         </p:txBody>
@@ -4569,7 +4523,7 @@
               </a:defRPr>
             </a:pPr>
             <a:r>
-              <a:t>2026/04/27</a:t>
+              <a:t>2026/05/07</a:t>
             </a:r>
           </a:p>
         </p:txBody>
@@ -4649,6 +4603,696 @@
             </a:pPr>
             <a:r>
               <a:t>5</a:t>
+            </a:r>
+          </a:p>
+        </p:txBody>
+      </p:sp>
+      <p:sp>
+        <p:nvSpPr>
+          <p:cNvPr id="8" name="TextBox 7"/>
+          <p:cNvSpPr txBox="1"/>
+          <p:nvPr/>
+        </p:nvSpPr>
+        <p:spPr>
+          <a:xfrm>
+            <a:off x="6858000" y="4869180"/>
+            <a:ext cx="1828800" cy="274320"/>
+          </a:xfrm>
+          <a:prstGeom prst="rect">
+            <a:avLst/>
+          </a:prstGeom>
+          <a:noFill/>
+        </p:spPr>
+        <p:txBody>
+          <a:bodyPr wrap="none">
+            <a:spAutoFit/>
+          </a:bodyPr>
+          <a:lstStyle/>
+          <a:p>
+            <a:pPr algn="r">
+              <a:defRPr sz="1200">
+                <a:latin typeface="Times New Roman"/>
+              </a:defRPr>
+            </a:pPr>
+            <a:r>
+              <a:t>Tax Monitor</a:t>
+            </a:r>
+          </a:p>
+        </p:txBody>
+      </p:sp>
+    </p:spTree>
+  </p:cSld>
+  <p:clrMapOvr>
+    <a:masterClrMapping/>
+  </p:clrMapOvr>
+</p:sld>
+</file>
+
+<file path=ppt/slides/slide6.xml><?xml version="1.0" encoding="utf-8"?>
+<p:sld xmlns:a="http://schemas.openxmlformats.org/drawingml/2006/main" xmlns:p="http://schemas.openxmlformats.org/presentationml/2006/main" xmlns:r="http://schemas.openxmlformats.org/officeDocument/2006/relationships">
+  <p:cSld>
+    <p:spTree>
+      <p:nvGrpSpPr>
+        <p:cNvPr id="1" name=""/>
+        <p:cNvGrpSpPr/>
+        <p:nvPr/>
+      </p:nvGrpSpPr>
+      <p:grpSpPr/>
+      <p:sp>
+        <p:nvSpPr>
+          <p:cNvPr id="2" name="Rectangle 1"/>
+          <p:cNvSpPr/>
+          <p:nvPr/>
+        </p:nvSpPr>
+        <p:spPr>
+          <a:xfrm>
+            <a:off x="0" y="0"/>
+            <a:ext cx="9144000" cy="648000"/>
+          </a:xfrm>
+          <a:prstGeom prst="rect">
+            <a:avLst/>
+          </a:prstGeom>
+          <a:solidFill>
+            <a:srgbClr val="2C3E6B"/>
+          </a:solidFill>
+          <a:ln>
+            <a:noFill/>
+          </a:ln>
+        </p:spPr>
+        <p:style>
+          <a:lnRef idx="1">
+            <a:schemeClr val="accent1"/>
+          </a:lnRef>
+          <a:fillRef idx="3">
+            <a:schemeClr val="accent1"/>
+          </a:fillRef>
+          <a:effectRef idx="2">
+            <a:schemeClr val="accent1"/>
+          </a:effectRef>
+          <a:fontRef idx="minor">
+            <a:schemeClr val="lt1"/>
+          </a:fontRef>
+        </p:style>
+        <p:txBody>
+          <a:bodyPr rtlCol="0" anchor="ctr"/>
+          <a:lstStyle/>
+          <a:p>
+            <a:pPr algn="ctr"/>
+          </a:p>
+        </p:txBody>
+      </p:sp>
+      <p:sp>
+        <p:nvSpPr>
+          <p:cNvPr id="3" name="TextBox 2"/>
+          <p:cNvSpPr txBox="1"/>
+          <p:nvPr/>
+        </p:nvSpPr>
+        <p:spPr>
+          <a:xfrm>
+            <a:off x="0" y="0"/>
+            <a:ext cx="9144000" cy="648000"/>
+          </a:xfrm>
+          <a:prstGeom prst="rect">
+            <a:avLst/>
+          </a:prstGeom>
+          <a:noFill/>
+        </p:spPr>
+        <p:txBody>
+          <a:bodyPr wrap="none" anchor="ctr" lIns="274320">
+            <a:spAutoFit/>
+          </a:bodyPr>
+          <a:lstStyle/>
+          <a:p>
+            <a:pPr algn="l">
+              <a:defRPr sz="3200" b="1">
+                <a:solidFill>
+                  <a:srgbClr val="FFFFFF"/>
+                </a:solidFill>
+                <a:latin typeface="Taipei Sans TC Beta"/>
+              </a:defRPr>
+            </a:pPr>
+            <a:r>
+              <a:t>頁4：管理重點與行動建議</a:t>
+            </a:r>
+          </a:p>
+        </p:txBody>
+      </p:sp>
+      <p:sp>
+        <p:nvSpPr>
+          <p:cNvPr id="4" name="TextBox 3"/>
+          <p:cNvSpPr txBox="1"/>
+          <p:nvPr/>
+        </p:nvSpPr>
+        <p:spPr>
+          <a:xfrm>
+            <a:off x="457200" y="876600"/>
+            <a:ext cx="8229600" cy="3535380"/>
+          </a:xfrm>
+          <a:prstGeom prst="rect">
+            <a:avLst/>
+          </a:prstGeom>
+          <a:noFill/>
+        </p:spPr>
+        <p:txBody>
+          <a:bodyPr wrap="square">
+            <a:normAutofit/>
+          </a:bodyPr>
+          <a:lstStyle/>
+          <a:p>
+            <a:pPr>
+              <a:spcAft>
+                <a:spcPts val="1200"/>
+              </a:spcAft>
+              <a:defRPr sz="2200">
+                <a:solidFill>
+                  <a:srgbClr val="222C38"/>
+                </a:solidFill>
+                <a:latin typeface="Taipei Sans TC Beta"/>
+              </a:defRPr>
+            </a:pPr>
+            <a:r>
+              <a:t>• 指定專案負責人：建立跨部門協調機制</a:t>
+            </a:r>
+          </a:p>
+          <a:p>
+            <a:pPr>
+              <a:spcAft>
+                <a:spcPts val="1200"/>
+              </a:spcAft>
+              <a:defRPr sz="2200">
+                <a:solidFill>
+                  <a:srgbClr val="222C38"/>
+                </a:solidFill>
+                <a:latin typeface="Taipei Sans TC Beta"/>
+              </a:defRPr>
+            </a:pPr>
+            <a:r>
+              <a:t>• 內控檢測：於2026年Q2前完成流程測試</a:t>
+            </a:r>
+          </a:p>
+          <a:p>
+            <a:pPr>
+              <a:spcAft>
+                <a:spcPts val="1200"/>
+              </a:spcAft>
+              <a:defRPr sz="2200">
+                <a:solidFill>
+                  <a:srgbClr val="222C38"/>
+                </a:solidFill>
+                <a:latin typeface="Taipei Sans TC Beta"/>
+              </a:defRPr>
+            </a:pPr>
+            <a:r>
+              <a:t>• 文件準備：儲備合規證明文件與交易紀錄</a:t>
+            </a:r>
+          </a:p>
+        </p:txBody>
+      </p:sp>
+      <p:sp>
+        <p:nvSpPr>
+          <p:cNvPr id="5" name="TextBox 4"/>
+          <p:cNvSpPr txBox="1"/>
+          <p:nvPr/>
+        </p:nvSpPr>
+        <p:spPr>
+          <a:xfrm>
+            <a:off x="457200" y="4869180"/>
+            <a:ext cx="1828800" cy="274320"/>
+          </a:xfrm>
+          <a:prstGeom prst="rect">
+            <a:avLst/>
+          </a:prstGeom>
+          <a:noFill/>
+        </p:spPr>
+        <p:txBody>
+          <a:bodyPr wrap="none">
+            <a:spAutoFit/>
+          </a:bodyPr>
+          <a:lstStyle/>
+          <a:p>
+            <a:pPr>
+              <a:defRPr sz="1200">
+                <a:latin typeface="Times New Roman"/>
+              </a:defRPr>
+            </a:pPr>
+            <a:r>
+              <a:t>2026/05/07</a:t>
+            </a:r>
+          </a:p>
+        </p:txBody>
+      </p:sp>
+      <p:sp>
+        <p:nvSpPr>
+          <p:cNvPr id="6" name="Rectangle 5"/>
+          <p:cNvSpPr/>
+          <p:nvPr/>
+        </p:nvSpPr>
+        <p:spPr>
+          <a:xfrm>
+            <a:off x="3841200" y="4927500"/>
+            <a:ext cx="1461599" cy="216000"/>
+          </a:xfrm>
+          <a:prstGeom prst="rect">
+            <a:avLst/>
+          </a:prstGeom>
+          <a:solidFill>
+            <a:srgbClr val="2C3E6B"/>
+          </a:solidFill>
+          <a:ln>
+            <a:noFill/>
+          </a:ln>
+        </p:spPr>
+        <p:style>
+          <a:lnRef idx="1">
+            <a:schemeClr val="accent1"/>
+          </a:lnRef>
+          <a:fillRef idx="3">
+            <a:schemeClr val="accent1"/>
+          </a:fillRef>
+          <a:effectRef idx="2">
+            <a:schemeClr val="accent1"/>
+          </a:effectRef>
+          <a:fontRef idx="minor">
+            <a:schemeClr val="lt1"/>
+          </a:fontRef>
+        </p:style>
+        <p:txBody>
+          <a:bodyPr rtlCol="0" anchor="ctr"/>
+          <a:lstStyle/>
+          <a:p>
+            <a:pPr algn="ctr"/>
+          </a:p>
+        </p:txBody>
+      </p:sp>
+      <p:sp>
+        <p:nvSpPr>
+          <p:cNvPr id="7" name="TextBox 6"/>
+          <p:cNvSpPr txBox="1"/>
+          <p:nvPr/>
+        </p:nvSpPr>
+        <p:spPr>
+          <a:xfrm>
+            <a:off x="3841200" y="4927500"/>
+            <a:ext cx="1461599" cy="216000"/>
+          </a:xfrm>
+          <a:prstGeom prst="rect">
+            <a:avLst/>
+          </a:prstGeom>
+          <a:noFill/>
+        </p:spPr>
+        <p:txBody>
+          <a:bodyPr wrap="none" anchor="ctr">
+            <a:spAutoFit/>
+          </a:bodyPr>
+          <a:lstStyle/>
+          <a:p>
+            <a:pPr algn="ctr">
+              <a:defRPr sz="1200">
+                <a:solidFill>
+                  <a:srgbClr val="FFFFFF"/>
+                </a:solidFill>
+                <a:latin typeface="Times New Roman"/>
+              </a:defRPr>
+            </a:pPr>
+            <a:r>
+              <a:t>6</a:t>
+            </a:r>
+          </a:p>
+        </p:txBody>
+      </p:sp>
+      <p:sp>
+        <p:nvSpPr>
+          <p:cNvPr id="8" name="TextBox 7"/>
+          <p:cNvSpPr txBox="1"/>
+          <p:nvPr/>
+        </p:nvSpPr>
+        <p:spPr>
+          <a:xfrm>
+            <a:off x="6858000" y="4869180"/>
+            <a:ext cx="1828800" cy="274320"/>
+          </a:xfrm>
+          <a:prstGeom prst="rect">
+            <a:avLst/>
+          </a:prstGeom>
+          <a:noFill/>
+        </p:spPr>
+        <p:txBody>
+          <a:bodyPr wrap="none">
+            <a:spAutoFit/>
+          </a:bodyPr>
+          <a:lstStyle/>
+          <a:p>
+            <a:pPr algn="r">
+              <a:defRPr sz="1200">
+                <a:latin typeface="Times New Roman"/>
+              </a:defRPr>
+            </a:pPr>
+            <a:r>
+              <a:t>Tax Monitor</a:t>
+            </a:r>
+          </a:p>
+        </p:txBody>
+      </p:sp>
+    </p:spTree>
+  </p:cSld>
+  <p:clrMapOvr>
+    <a:masterClrMapping/>
+  </p:clrMapOvr>
+</p:sld>
+</file>
+
+<file path=ppt/slides/slide7.xml><?xml version="1.0" encoding="utf-8"?>
+<p:sld xmlns:a="http://schemas.openxmlformats.org/drawingml/2006/main" xmlns:p="http://schemas.openxmlformats.org/presentationml/2006/main" xmlns:r="http://schemas.openxmlformats.org/officeDocument/2006/relationships">
+  <p:cSld>
+    <p:spTree>
+      <p:nvGrpSpPr>
+        <p:cNvPr id="1" name=""/>
+        <p:cNvGrpSpPr/>
+        <p:nvPr/>
+      </p:nvGrpSpPr>
+      <p:grpSpPr/>
+      <p:sp>
+        <p:nvSpPr>
+          <p:cNvPr id="2" name="Rectangle 1"/>
+          <p:cNvSpPr/>
+          <p:nvPr/>
+        </p:nvSpPr>
+        <p:spPr>
+          <a:xfrm>
+            <a:off x="0" y="0"/>
+            <a:ext cx="9144000" cy="648000"/>
+          </a:xfrm>
+          <a:prstGeom prst="rect">
+            <a:avLst/>
+          </a:prstGeom>
+          <a:solidFill>
+            <a:srgbClr val="2C3E6B"/>
+          </a:solidFill>
+          <a:ln>
+            <a:noFill/>
+          </a:ln>
+        </p:spPr>
+        <p:style>
+          <a:lnRef idx="1">
+            <a:schemeClr val="accent1"/>
+          </a:lnRef>
+          <a:fillRef idx="3">
+            <a:schemeClr val="accent1"/>
+          </a:fillRef>
+          <a:effectRef idx="2">
+            <a:schemeClr val="accent1"/>
+          </a:effectRef>
+          <a:fontRef idx="minor">
+            <a:schemeClr val="lt1"/>
+          </a:fontRef>
+        </p:style>
+        <p:txBody>
+          <a:bodyPr rtlCol="0" anchor="ctr"/>
+          <a:lstStyle/>
+          <a:p>
+            <a:pPr algn="ctr"/>
+          </a:p>
+        </p:txBody>
+      </p:sp>
+      <p:sp>
+        <p:nvSpPr>
+          <p:cNvPr id="3" name="TextBox 2"/>
+          <p:cNvSpPr txBox="1"/>
+          <p:nvPr/>
+        </p:nvSpPr>
+        <p:spPr>
+          <a:xfrm>
+            <a:off x="0" y="0"/>
+            <a:ext cx="9144000" cy="648000"/>
+          </a:xfrm>
+          <a:prstGeom prst="rect">
+            <a:avLst/>
+          </a:prstGeom>
+          <a:noFill/>
+        </p:spPr>
+        <p:txBody>
+          <a:bodyPr wrap="none" anchor="ctr" lIns="274320">
+            <a:spAutoFit/>
+          </a:bodyPr>
+          <a:lstStyle/>
+          <a:p>
+            <a:pPr algn="l">
+              <a:defRPr sz="3200" b="1">
+                <a:solidFill>
+                  <a:srgbClr val="FFFFFF"/>
+                </a:solidFill>
+                <a:latin typeface="Taipei Sans TC Beta"/>
+              </a:defRPr>
+            </a:pPr>
+            <a:r>
+              <a:t>資料來源 / Sources &amp; Citations</a:t>
+            </a:r>
+          </a:p>
+        </p:txBody>
+      </p:sp>
+      <p:sp>
+        <p:nvSpPr>
+          <p:cNvPr id="4" name="TextBox 3"/>
+          <p:cNvSpPr txBox="1"/>
+          <p:nvPr/>
+        </p:nvSpPr>
+        <p:spPr>
+          <a:xfrm>
+            <a:off x="457200" y="876600"/>
+            <a:ext cx="8229600" cy="3535380"/>
+          </a:xfrm>
+          <a:prstGeom prst="rect">
+            <a:avLst/>
+          </a:prstGeom>
+          <a:noFill/>
+        </p:spPr>
+        <p:txBody>
+          <a:bodyPr wrap="square">
+            <a:normAutofit/>
+          </a:bodyPr>
+          <a:lstStyle/>
+          <a:p>
+            <a:pPr>
+              <a:spcAft>
+                <a:spcPts val="1200"/>
+              </a:spcAft>
+              <a:defRPr sz="2200">
+                <a:solidFill>
+                  <a:srgbClr val="222C38"/>
+                </a:solidFill>
+                <a:latin typeface="Taipei Sans TC Beta"/>
+              </a:defRPr>
+            </a:pPr>
+            <a:r>
+              <a:t>• 原始文件 / Source title: Sample 2026 Cross-Border Tax Filing Update</a:t>
+            </a:r>
+          </a:p>
+          <a:p>
+            <a:pPr>
+              <a:spcAft>
+                <a:spcPts val="1200"/>
+              </a:spcAft>
+              <a:defRPr sz="2200">
+                <a:solidFill>
+                  <a:srgbClr val="222C38"/>
+                </a:solidFill>
+                <a:latin typeface="Taipei Sans TC Beta"/>
+              </a:defRPr>
+            </a:pPr>
+            <a:r>
+              <a:t>• 來源網址 / URL: http://127.0.0.1:64468/sample_tax_update.html</a:t>
+            </a:r>
+          </a:p>
+          <a:p>
+            <a:pPr>
+              <a:spcAft>
+                <a:spcPts val="1200"/>
+              </a:spcAft>
+              <a:defRPr sz="2200">
+                <a:solidFill>
+                  <a:srgbClr val="222C38"/>
+                </a:solidFill>
+                <a:latin typeface="Taipei Sans TC Beta"/>
+              </a:defRPr>
+            </a:pPr>
+            <a:r>
+              <a:t>• 來源類型 / Source: web via local_smoke_test</a:t>
+            </a:r>
+          </a:p>
+          <a:p>
+            <a:pPr>
+              <a:spcAft>
+                <a:spcPts val="1200"/>
+              </a:spcAft>
+              <a:defRPr sz="2200">
+                <a:solidFill>
+                  <a:srgbClr val="222C38"/>
+                </a:solidFill>
+                <a:latin typeface="Taipei Sans TC Beta"/>
+              </a:defRPr>
+            </a:pPr>
+            <a:r>
+              <a:t>• 原文語言 / Original language: en</a:t>
+            </a:r>
+          </a:p>
+          <a:p>
+            <a:pPr>
+              <a:spcAft>
+                <a:spcPts val="1200"/>
+              </a:spcAft>
+              <a:defRPr sz="2200">
+                <a:solidFill>
+                  <a:srgbClr val="222C38"/>
+                </a:solidFill>
+                <a:latin typeface="Taipei Sans TC Beta"/>
+              </a:defRPr>
+            </a:pPr>
+            <a:r>
+              <a:t>• 地區 / 產業: TW · technology</a:t>
+            </a:r>
+          </a:p>
+          <a:p>
+            <a:pPr>
+              <a:spcAft>
+                <a:spcPts val="1200"/>
+              </a:spcAft>
+              <a:defRPr sz="2200">
+                <a:solidFill>
+                  <a:srgbClr val="222C38"/>
+                </a:solidFill>
+                <a:latin typeface="Taipei Sans TC Beta"/>
+              </a:defRPr>
+            </a:pPr>
+            <a:r>
+              <a:t>• 匯入時間 / Ingested at: 2026-05-07T17:34:40</a:t>
+            </a:r>
+          </a:p>
+          <a:p>
+            <a:pPr>
+              <a:spcAft>
+                <a:spcPts val="1200"/>
+              </a:spcAft>
+              <a:defRPr sz="2200">
+                <a:solidFill>
+                  <a:srgbClr val="222C38"/>
+                </a:solidFill>
+                <a:latin typeface="Taipei Sans TC Beta"/>
+              </a:defRPr>
+            </a:pPr>
+            <a:r>
+              <a:t>• 風險判斷 / Risk: High (penalty, audit, filing_obligation, effective_date, draft_regulation, compliance_change)</a:t>
+            </a:r>
+          </a:p>
+        </p:txBody>
+      </p:sp>
+      <p:sp>
+        <p:nvSpPr>
+          <p:cNvPr id="5" name="TextBox 4"/>
+          <p:cNvSpPr txBox="1"/>
+          <p:nvPr/>
+        </p:nvSpPr>
+        <p:spPr>
+          <a:xfrm>
+            <a:off x="457200" y="4869180"/>
+            <a:ext cx="1828800" cy="274320"/>
+          </a:xfrm>
+          <a:prstGeom prst="rect">
+            <a:avLst/>
+          </a:prstGeom>
+          <a:noFill/>
+        </p:spPr>
+        <p:txBody>
+          <a:bodyPr wrap="none">
+            <a:spAutoFit/>
+          </a:bodyPr>
+          <a:lstStyle/>
+          <a:p>
+            <a:pPr>
+              <a:defRPr sz="1200">
+                <a:latin typeface="Times New Roman"/>
+              </a:defRPr>
+            </a:pPr>
+            <a:r>
+              <a:t>2026/05/07</a:t>
+            </a:r>
+          </a:p>
+        </p:txBody>
+      </p:sp>
+      <p:sp>
+        <p:nvSpPr>
+          <p:cNvPr id="6" name="Rectangle 5"/>
+          <p:cNvSpPr/>
+          <p:nvPr/>
+        </p:nvSpPr>
+        <p:spPr>
+          <a:xfrm>
+            <a:off x="3841200" y="4927500"/>
+            <a:ext cx="1461599" cy="216000"/>
+          </a:xfrm>
+          <a:prstGeom prst="rect">
+            <a:avLst/>
+          </a:prstGeom>
+          <a:solidFill>
+            <a:srgbClr val="2C3E6B"/>
+          </a:solidFill>
+          <a:ln>
+            <a:noFill/>
+          </a:ln>
+        </p:spPr>
+        <p:style>
+          <a:lnRef idx="1">
+            <a:schemeClr val="accent1"/>
+          </a:lnRef>
+          <a:fillRef idx="3">
+            <a:schemeClr val="accent1"/>
+          </a:fillRef>
+          <a:effectRef idx="2">
+            <a:schemeClr val="accent1"/>
+          </a:effectRef>
+          <a:fontRef idx="minor">
+            <a:schemeClr val="lt1"/>
+          </a:fontRef>
+        </p:style>
+        <p:txBody>
+          <a:bodyPr rtlCol="0" anchor="ctr"/>
+          <a:lstStyle/>
+          <a:p>
+            <a:pPr algn="ctr"/>
+          </a:p>
+        </p:txBody>
+      </p:sp>
+      <p:sp>
+        <p:nvSpPr>
+          <p:cNvPr id="7" name="TextBox 6"/>
+          <p:cNvSpPr txBox="1"/>
+          <p:nvPr/>
+        </p:nvSpPr>
+        <p:spPr>
+          <a:xfrm>
+            <a:off x="3841200" y="4927500"/>
+            <a:ext cx="1461599" cy="216000"/>
+          </a:xfrm>
+          <a:prstGeom prst="rect">
+            <a:avLst/>
+          </a:prstGeom>
+          <a:noFill/>
+        </p:spPr>
+        <p:txBody>
+          <a:bodyPr wrap="none" anchor="ctr">
+            <a:spAutoFit/>
+          </a:bodyPr>
+          <a:lstStyle/>
+          <a:p>
+            <a:pPr algn="ctr">
+              <a:defRPr sz="1200">
+                <a:solidFill>
+                  <a:srgbClr val="FFFFFF"/>
+                </a:solidFill>
+                <a:latin typeface="Times New Roman"/>
+              </a:defRPr>
+            </a:pPr>
+            <a:r>
+              <a:t>7</a:t>
             </a:r>
           </a:p>
         </p:txBody>
